--- a/ContributionsForDiscussions/onmi2025.RJ.001_TAPI_pagination.pptx
+++ b/ContributionsForDiscussions/onmi2025.RJ.001_TAPI_pagination.pptx
@@ -125,7 +125,7 @@
 <file path=ppt/revisionInfo.xml><?xml version="1.0" encoding="utf-8"?>
 <p1510:revInfo xmlns:a="http://schemas.openxmlformats.org/drawingml/2006/main" xmlns:r="http://schemas.openxmlformats.org/officeDocument/2006/relationships" xmlns:p1510="http://schemas.microsoft.com/office/powerpoint/2015/10/main">
   <p1510:revLst>
-    <p1510:client id="{1474C3F4-BC3B-4CA2-90B8-EE07CE595186}" v="4" dt="2025-09-05T05:27:51.362"/>
+    <p1510:client id="{1474C3F4-BC3B-4CA2-90B8-EE07CE595186}" v="10" dt="2025-09-05T11:25:45.465"/>
   </p1510:revLst>
 </p1510:revInfo>
 </file>
@@ -135,7 +135,7 @@
   <pc:docChgLst>
     <pc:chgData name="Joyce, Roshan" userId="42de0764-d99f-4bc9-bb91-484b45138fac" providerId="ADAL" clId="{74400332-FE63-4A0D-A7A3-62625B950B2E}"/>
     <pc:docChg chg="undo custSel addSld modSld">
-      <pc:chgData name="Joyce, Roshan" userId="42de0764-d99f-4bc9-bb91-484b45138fac" providerId="ADAL" clId="{74400332-FE63-4A0D-A7A3-62625B950B2E}" dt="2025-09-05T05:40:04.180" v="1119" actId="20577"/>
+      <pc:chgData name="Joyce, Roshan" userId="42de0764-d99f-4bc9-bb91-484b45138fac" providerId="ADAL" clId="{74400332-FE63-4A0D-A7A3-62625B950B2E}" dt="2025-09-05T11:33:21.318" v="1485" actId="20577"/>
       <pc:docMkLst>
         <pc:docMk/>
       </pc:docMkLst>
@@ -253,17 +253,33 @@
         </pc:spChg>
       </pc:sldChg>
       <pc:sldChg chg="modSp mod">
-        <pc:chgData name="Joyce, Roshan" userId="42de0764-d99f-4bc9-bb91-484b45138fac" providerId="ADAL" clId="{74400332-FE63-4A0D-A7A3-62625B950B2E}" dt="2025-09-05T05:40:04.180" v="1119" actId="20577"/>
+        <pc:chgData name="Joyce, Roshan" userId="42de0764-d99f-4bc9-bb91-484b45138fac" providerId="ADAL" clId="{74400332-FE63-4A0D-A7A3-62625B950B2E}" dt="2025-09-05T11:33:21.318" v="1485" actId="20577"/>
         <pc:sldMkLst>
           <pc:docMk/>
           <pc:sldMk cId="2509089082" sldId="265"/>
         </pc:sldMkLst>
         <pc:spChg chg="mod">
-          <ac:chgData name="Joyce, Roshan" userId="42de0764-d99f-4bc9-bb91-484b45138fac" providerId="ADAL" clId="{74400332-FE63-4A0D-A7A3-62625B950B2E}" dt="2025-09-05T05:40:04.180" v="1119" actId="20577"/>
+          <ac:chgData name="Joyce, Roshan" userId="42de0764-d99f-4bc9-bb91-484b45138fac" providerId="ADAL" clId="{74400332-FE63-4A0D-A7A3-62625B950B2E}" dt="2025-09-05T11:26:51.518" v="1264" actId="6549"/>
+          <ac:spMkLst>
+            <pc:docMk/>
+            <pc:sldMk cId="2509089082" sldId="265"/>
+            <ac:spMk id="4" creationId="{3C7E670F-F199-2449-2665-27BF9CF2545B}"/>
+          </ac:spMkLst>
+        </pc:spChg>
+        <pc:spChg chg="mod">
+          <ac:chgData name="Joyce, Roshan" userId="42de0764-d99f-4bc9-bb91-484b45138fac" providerId="ADAL" clId="{74400332-FE63-4A0D-A7A3-62625B950B2E}" dt="2025-09-05T11:33:21.318" v="1485" actId="20577"/>
           <ac:spMkLst>
             <pc:docMk/>
             <pc:sldMk cId="2509089082" sldId="265"/>
             <ac:spMk id="5" creationId="{663CBF98-C8AD-BF00-D0CE-5996E8506243}"/>
+          </ac:spMkLst>
+        </pc:spChg>
+        <pc:spChg chg="mod">
+          <ac:chgData name="Joyce, Roshan" userId="42de0764-d99f-4bc9-bb91-484b45138fac" providerId="ADAL" clId="{74400332-FE63-4A0D-A7A3-62625B950B2E}" dt="2025-09-05T11:26:42.043" v="1252" actId="6549"/>
+          <ac:spMkLst>
+            <pc:docMk/>
+            <pc:sldMk cId="2509089082" sldId="265"/>
+            <ac:spMk id="7" creationId="{BBA0AEB7-D6C8-C385-0382-B4F5B61B7FE9}"/>
           </ac:spMkLst>
         </pc:spChg>
       </pc:sldChg>
@@ -6084,7 +6100,7 @@
               <a:rPr lang="en-US" sz="1000" dirty="0" err="1">
                 <a:latin typeface="Consolas" panose="020B0609020204030204" pitchFamily="49" charset="0"/>
               </a:rPr>
-              <a:t>tapi-topology:topology</a:t>
+              <a:t>tapi-topology:node</a:t>
             </a:r>
             <a:r>
               <a:rPr lang="en-US" sz="1000" dirty="0">
@@ -6112,7 +6128,7 @@
               <a:rPr lang="en-US" sz="1000" dirty="0">
                 <a:latin typeface="Consolas" panose="020B0609020204030204" pitchFamily="49" charset="0"/>
               </a:rPr>
-              <a:t>      "node": [</a:t>
+              <a:t>      &lt;node-data-1&gt;</a:t>
             </a:r>
             <a:br>
               <a:rPr lang="en-US" sz="1000" dirty="0">
@@ -6123,7 +6139,7 @@
               <a:rPr lang="en-US" sz="1000" dirty="0">
                 <a:latin typeface="Consolas" panose="020B0609020204030204" pitchFamily="49" charset="0"/>
               </a:rPr>
-              <a:t>        {</a:t>
+              <a:t>    },</a:t>
             </a:r>
             <a:br>
               <a:rPr lang="en-US" sz="1000" dirty="0">
@@ -6134,7 +6150,7 @@
               <a:rPr lang="en-US" sz="1000" dirty="0">
                 <a:latin typeface="Consolas" panose="020B0609020204030204" pitchFamily="49" charset="0"/>
               </a:rPr>
-              <a:t>          &lt;node-data-1&gt;</a:t>
+              <a:t>    {</a:t>
             </a:r>
             <a:br>
               <a:rPr lang="en-US" sz="1000" dirty="0">
@@ -6145,7 +6161,7 @@
               <a:rPr lang="en-US" sz="1000" dirty="0">
                 <a:latin typeface="Consolas" panose="020B0609020204030204" pitchFamily="49" charset="0"/>
               </a:rPr>
-              <a:t>        },</a:t>
+              <a:t>      &lt;node-data-2&gt;</a:t>
             </a:r>
             <a:br>
               <a:rPr lang="en-US" sz="1000" dirty="0">
@@ -6156,7 +6172,7 @@
               <a:rPr lang="en-US" sz="1000" dirty="0">
                 <a:latin typeface="Consolas" panose="020B0609020204030204" pitchFamily="49" charset="0"/>
               </a:rPr>
-              <a:t>        {</a:t>
+              <a:t>    }</a:t>
             </a:r>
             <a:br>
               <a:rPr lang="en-US" sz="1000" dirty="0">
@@ -6167,7 +6183,7 @@
               <a:rPr lang="en-US" sz="1000" dirty="0">
                 <a:latin typeface="Consolas" panose="020B0609020204030204" pitchFamily="49" charset="0"/>
               </a:rPr>
-              <a:t>          &lt;node-data-2&gt;</a:t>
+              <a:t>  ], </a:t>
             </a:r>
             <a:br>
               <a:rPr lang="en-US" sz="1000" dirty="0">
@@ -6178,29 +6194,7 @@
               <a:rPr lang="en-US" sz="1000" dirty="0">
                 <a:latin typeface="Consolas" panose="020B0609020204030204" pitchFamily="49" charset="0"/>
               </a:rPr>
-              <a:t>        }</a:t>
-            </a:r>
-            <a:br>
-              <a:rPr lang="en-US" sz="1000" dirty="0">
-                <a:latin typeface="Consolas" panose="020B0609020204030204" pitchFamily="49" charset="0"/>
-              </a:rPr>
-            </a:br>
-            <a:r>
-              <a:rPr lang="en-US" sz="1000" dirty="0">
-                <a:latin typeface="Consolas" panose="020B0609020204030204" pitchFamily="49" charset="0"/>
-              </a:rPr>
-              <a:t>      ], </a:t>
-            </a:r>
-            <a:br>
-              <a:rPr lang="en-US" sz="1000" dirty="0">
-                <a:latin typeface="Consolas" panose="020B0609020204030204" pitchFamily="49" charset="0"/>
-              </a:rPr>
-            </a:br>
-            <a:r>
-              <a:rPr lang="en-US" sz="1000" dirty="0">
-                <a:latin typeface="Consolas" panose="020B0609020204030204" pitchFamily="49" charset="0"/>
-              </a:rPr>
-              <a:t>      </a:t>
+              <a:t>  </a:t>
             </a:r>
             <a:r>
               <a:rPr lang="en-US" sz="1000" dirty="0">
@@ -6212,7 +6206,31 @@
                 </a:solidFill>
                 <a:latin typeface="Consolas" panose="020B0609020204030204" pitchFamily="49" charset="0"/>
               </a:rPr>
-              <a:t>“@”: [</a:t>
+              <a:t>“@</a:t>
+            </a:r>
+            <a:r>
+              <a:rPr lang="en-US" sz="1000" dirty="0" err="1">
+                <a:solidFill>
+                  <a:schemeClr val="accent5">
+                    <a:lumMod val="60000"/>
+                    <a:lumOff val="40000"/>
+                  </a:schemeClr>
+                </a:solidFill>
+                <a:latin typeface="Consolas" panose="020B0609020204030204" pitchFamily="49" charset="0"/>
+              </a:rPr>
+              <a:t>tapi-topology:node</a:t>
+            </a:r>
+            <a:r>
+              <a:rPr lang="en-US" sz="1000" dirty="0">
+                <a:solidFill>
+                  <a:schemeClr val="accent5">
+                    <a:lumMod val="60000"/>
+                    <a:lumOff val="40000"/>
+                  </a:schemeClr>
+                </a:solidFill>
+                <a:latin typeface="Consolas" panose="020B0609020204030204" pitchFamily="49" charset="0"/>
+              </a:rPr>
+              <a:t>”: [</a:t>
             </a:r>
             <a:br>
               <a:rPr lang="en-US" sz="1000" dirty="0">
@@ -6235,7 +6253,7 @@
                 </a:solidFill>
                 <a:latin typeface="Consolas" panose="020B0609020204030204" pitchFamily="49" charset="0"/>
               </a:rPr>
-              <a:t>        {</a:t>
+              <a:t>    {</a:t>
             </a:r>
             <a:br>
               <a:rPr lang="en-US" sz="1000" dirty="0">
@@ -6258,7 +6276,7 @@
                 </a:solidFill>
                 <a:latin typeface="Consolas" panose="020B0609020204030204" pitchFamily="49" charset="0"/>
               </a:rPr>
-              <a:t>          "</a:t>
+              <a:t>      "</a:t>
             </a:r>
             <a:r>
               <a:rPr lang="en-US" sz="1000" dirty="0" err="1">
@@ -6305,10 +6323,10 @@
                 </a:solidFill>
                 <a:latin typeface="Consolas" panose="020B0609020204030204" pitchFamily="49" charset="0"/>
               </a:rPr>
-              <a:t>          "</a:t>
-            </a:r>
-            <a:r>
-              <a:rPr lang="en-US" sz="1000" dirty="0" err="1">
+              <a:t>      </a:t>
+            </a:r>
+            <a:r>
+              <a:rPr lang="en-US" sz="1000" strike="sngStrike" dirty="0">
                 <a:solidFill>
                   <a:schemeClr val="accent5">
                     <a:lumMod val="60000"/>
@@ -6317,10 +6335,22 @@
                 </a:solidFill>
                 <a:latin typeface="Consolas" panose="020B0609020204030204" pitchFamily="49" charset="0"/>
               </a:rPr>
+              <a:t>"</a:t>
+            </a:r>
+            <a:r>
+              <a:rPr lang="en-US" sz="1000" strike="sngStrike" dirty="0" err="1">
+                <a:solidFill>
+                  <a:schemeClr val="accent5">
+                    <a:lumMod val="60000"/>
+                    <a:lumOff val="40000"/>
+                  </a:schemeClr>
+                </a:solidFill>
+                <a:latin typeface="Consolas" panose="020B0609020204030204" pitchFamily="49" charset="0"/>
+              </a:rPr>
               <a:t>ietf-list-pagination:previous</a:t>
             </a:r>
             <a:r>
-              <a:rPr lang="en-US" sz="1000" dirty="0">
+              <a:rPr lang="en-US" sz="1000" strike="sngStrike" dirty="0">
                 <a:solidFill>
                   <a:schemeClr val="accent5">
                     <a:lumMod val="60000"/>
@@ -6352,7 +6382,7 @@
                 </a:solidFill>
                 <a:latin typeface="Consolas" panose="020B0609020204030204" pitchFamily="49" charset="0"/>
               </a:rPr>
-              <a:t>          "</a:t>
+              <a:t>      "</a:t>
             </a:r>
             <a:r>
               <a:rPr lang="en-US" sz="1000" dirty="0" err="1">
@@ -6399,7 +6429,7 @@
                 </a:solidFill>
                 <a:latin typeface="Consolas" panose="020B0609020204030204" pitchFamily="49" charset="0"/>
               </a:rPr>
-              <a:t>        }</a:t>
+              <a:t>    }</a:t>
             </a:r>
             <a:br>
               <a:rPr lang="en-US" sz="1000" dirty="0">
@@ -6422,7 +6452,7 @@
                 </a:solidFill>
                 <a:latin typeface="Consolas" panose="020B0609020204030204" pitchFamily="49" charset="0"/>
               </a:rPr>
-              <a:t>      ]</a:t>
+              <a:t>  ]</a:t>
             </a:r>
             <a:br>
               <a:rPr lang="en-US" sz="1000" dirty="0">
@@ -6433,30 +6463,16 @@
               <a:rPr lang="en-US" sz="1000" dirty="0">
                 <a:latin typeface="Consolas" panose="020B0609020204030204" pitchFamily="49" charset="0"/>
               </a:rPr>
-              <a:t>    }</a:t>
+              <a:t>}</a:t>
             </a:r>
             <a:br>
               <a:rPr lang="en-US" sz="1000" dirty="0">
                 <a:latin typeface="Consolas" panose="020B0609020204030204" pitchFamily="49" charset="0"/>
               </a:rPr>
             </a:br>
-            <a:r>
-              <a:rPr lang="en-US" sz="1000" dirty="0">
-                <a:latin typeface="Consolas" panose="020B0609020204030204" pitchFamily="49" charset="0"/>
-              </a:rPr>
-              <a:t>  ],</a:t>
-            </a:r>
-            <a:br>
-              <a:rPr lang="en-US" sz="1000" dirty="0">
-                <a:latin typeface="Consolas" panose="020B0609020204030204" pitchFamily="49" charset="0"/>
-              </a:rPr>
-            </a:br>
-            <a:r>
-              <a:rPr lang="en-US" sz="1000" dirty="0">
-                <a:latin typeface="Consolas" panose="020B0609020204030204" pitchFamily="49" charset="0"/>
-              </a:rPr>
-              <a:t>}</a:t>
-            </a:r>
+            <a:endParaRPr lang="en-US" sz="1000" dirty="0">
+              <a:latin typeface="Consolas" panose="020B0609020204030204" pitchFamily="49" charset="0"/>
+            </a:endParaRPr>
           </a:p>
           <a:p>
             <a:pPr marL="0" indent="0">
@@ -6855,7 +6871,7 @@
               <a:rPr lang="en-US" sz="1000" dirty="0" err="1">
                 <a:latin typeface="Consolas" panose="020B0609020204030204" pitchFamily="49" charset="0"/>
               </a:rPr>
-              <a:t>tapi-topology:topology</a:t>
+              <a:t>tapi-topology:node</a:t>
             </a:r>
             <a:r>
               <a:rPr lang="en-US" sz="1000" dirty="0">
@@ -6883,7 +6899,7 @@
               <a:rPr lang="en-US" sz="1000" dirty="0">
                 <a:latin typeface="Consolas" panose="020B0609020204030204" pitchFamily="49" charset="0"/>
               </a:rPr>
-              <a:t>      "node": [</a:t>
+              <a:t>      &lt;node-data-1&gt;</a:t>
             </a:r>
             <a:br>
               <a:rPr lang="en-US" sz="1000" dirty="0">
@@ -6894,7 +6910,7 @@
               <a:rPr lang="en-US" sz="1000" dirty="0">
                 <a:latin typeface="Consolas" panose="020B0609020204030204" pitchFamily="49" charset="0"/>
               </a:rPr>
-              <a:t>        {</a:t>
+              <a:t>    },</a:t>
             </a:r>
             <a:br>
               <a:rPr lang="en-US" sz="1000" dirty="0">
@@ -6905,7 +6921,7 @@
               <a:rPr lang="en-US" sz="1000" dirty="0">
                 <a:latin typeface="Consolas" panose="020B0609020204030204" pitchFamily="49" charset="0"/>
               </a:rPr>
-              <a:t>          &lt;node-data-1&gt;</a:t>
+              <a:t>    {</a:t>
             </a:r>
             <a:br>
               <a:rPr lang="en-US" sz="1000" dirty="0">
@@ -6916,7 +6932,7 @@
               <a:rPr lang="en-US" sz="1000" dirty="0">
                 <a:latin typeface="Consolas" panose="020B0609020204030204" pitchFamily="49" charset="0"/>
               </a:rPr>
-              <a:t>        },</a:t>
+              <a:t>      &lt;node-data-2&gt;</a:t>
             </a:r>
             <a:br>
               <a:rPr lang="en-US" sz="1000" dirty="0">
@@ -6927,7 +6943,7 @@
               <a:rPr lang="en-US" sz="1000" dirty="0">
                 <a:latin typeface="Consolas" panose="020B0609020204030204" pitchFamily="49" charset="0"/>
               </a:rPr>
-              <a:t>        {</a:t>
+              <a:t>    }</a:t>
             </a:r>
             <a:br>
               <a:rPr lang="en-US" sz="1000" dirty="0">
@@ -6938,7 +6954,7 @@
               <a:rPr lang="en-US" sz="1000" dirty="0">
                 <a:latin typeface="Consolas" panose="020B0609020204030204" pitchFamily="49" charset="0"/>
               </a:rPr>
-              <a:t>          &lt;node-data-2&gt;</a:t>
+              <a:t>  ], </a:t>
             </a:r>
             <a:br>
               <a:rPr lang="en-US" sz="1000" dirty="0">
@@ -6949,29 +6965,7 @@
               <a:rPr lang="en-US" sz="1000" dirty="0">
                 <a:latin typeface="Consolas" panose="020B0609020204030204" pitchFamily="49" charset="0"/>
               </a:rPr>
-              <a:t>        }</a:t>
-            </a:r>
-            <a:br>
-              <a:rPr lang="en-US" sz="1000" dirty="0">
-                <a:latin typeface="Consolas" panose="020B0609020204030204" pitchFamily="49" charset="0"/>
-              </a:rPr>
-            </a:br>
-            <a:r>
-              <a:rPr lang="en-US" sz="1000" dirty="0">
-                <a:latin typeface="Consolas" panose="020B0609020204030204" pitchFamily="49" charset="0"/>
-              </a:rPr>
-              <a:t>      ], </a:t>
-            </a:r>
-            <a:br>
-              <a:rPr lang="en-US" sz="1000" dirty="0">
-                <a:latin typeface="Consolas" panose="020B0609020204030204" pitchFamily="49" charset="0"/>
-              </a:rPr>
-            </a:br>
-            <a:r>
-              <a:rPr lang="en-US" sz="1000" dirty="0">
-                <a:latin typeface="Consolas" panose="020B0609020204030204" pitchFamily="49" charset="0"/>
-              </a:rPr>
-              <a:t>      </a:t>
+              <a:t>  </a:t>
             </a:r>
             <a:r>
               <a:rPr lang="en-US" sz="1000" dirty="0">
@@ -6983,7 +6977,31 @@
                 </a:solidFill>
                 <a:latin typeface="Consolas" panose="020B0609020204030204" pitchFamily="49" charset="0"/>
               </a:rPr>
-              <a:t>“@”: [</a:t>
+              <a:t>“@</a:t>
+            </a:r>
+            <a:r>
+              <a:rPr lang="en-US" sz="1000" dirty="0" err="1">
+                <a:solidFill>
+                  <a:schemeClr val="accent5">
+                    <a:lumMod val="60000"/>
+                    <a:lumOff val="40000"/>
+                  </a:schemeClr>
+                </a:solidFill>
+                <a:latin typeface="Consolas" panose="020B0609020204030204" pitchFamily="49" charset="0"/>
+              </a:rPr>
+              <a:t>tapi-topology:node</a:t>
+            </a:r>
+            <a:r>
+              <a:rPr lang="en-US" sz="1000" dirty="0">
+                <a:solidFill>
+                  <a:schemeClr val="accent5">
+                    <a:lumMod val="60000"/>
+                    <a:lumOff val="40000"/>
+                  </a:schemeClr>
+                </a:solidFill>
+                <a:latin typeface="Consolas" panose="020B0609020204030204" pitchFamily="49" charset="0"/>
+              </a:rPr>
+              <a:t>”: [</a:t>
             </a:r>
             <a:br>
               <a:rPr lang="en-US" sz="1000" dirty="0">
@@ -7006,7 +7024,7 @@
                 </a:solidFill>
                 <a:latin typeface="Consolas" panose="020B0609020204030204" pitchFamily="49" charset="0"/>
               </a:rPr>
-              <a:t>        {</a:t>
+              <a:t>    {</a:t>
             </a:r>
             <a:br>
               <a:rPr lang="en-US" sz="1000" dirty="0">
@@ -7029,7 +7047,7 @@
                 </a:solidFill>
                 <a:latin typeface="Consolas" panose="020B0609020204030204" pitchFamily="49" charset="0"/>
               </a:rPr>
-              <a:t>          "</a:t>
+              <a:t>      "</a:t>
             </a:r>
             <a:r>
               <a:rPr lang="en-US" sz="1000" dirty="0" err="1">
@@ -7076,7 +7094,7 @@
                 </a:solidFill>
                 <a:latin typeface="Consolas" panose="020B0609020204030204" pitchFamily="49" charset="0"/>
               </a:rPr>
-              <a:t>        }</a:t>
+              <a:t>    }</a:t>
             </a:r>
             <a:br>
               <a:rPr lang="en-US" sz="1000" dirty="0">
@@ -7099,32 +7117,16 @@
                 </a:solidFill>
                 <a:latin typeface="Consolas" panose="020B0609020204030204" pitchFamily="49" charset="0"/>
               </a:rPr>
-              <a:t>      ]</a:t>
+              <a:t>  ]</a:t>
             </a:r>
             <a:br>
               <a:rPr lang="en-US" sz="1000" dirty="0">
-                <a:latin typeface="Consolas" panose="020B0609020204030204" pitchFamily="49" charset="0"/>
-              </a:rPr>
-            </a:br>
-            <a:r>
-              <a:rPr lang="en-US" sz="1000" dirty="0">
-                <a:latin typeface="Consolas" panose="020B0609020204030204" pitchFamily="49" charset="0"/>
-              </a:rPr>
-              <a:t>    }</a:t>
-            </a:r>
-            <a:br>
-              <a:rPr lang="en-US" sz="1000" dirty="0">
-                <a:latin typeface="Consolas" panose="020B0609020204030204" pitchFamily="49" charset="0"/>
-              </a:rPr>
-            </a:br>
-            <a:r>
-              <a:rPr lang="en-US" sz="1000" dirty="0">
-                <a:latin typeface="Consolas" panose="020B0609020204030204" pitchFamily="49" charset="0"/>
-              </a:rPr>
-              <a:t>  ],</a:t>
-            </a:r>
-            <a:br>
-              <a:rPr lang="en-US" sz="1000" dirty="0">
+                <a:solidFill>
+                  <a:schemeClr val="accent5">
+                    <a:lumMod val="60000"/>
+                    <a:lumOff val="40000"/>
+                  </a:schemeClr>
+                </a:solidFill>
                 <a:latin typeface="Consolas" panose="020B0609020204030204" pitchFamily="49" charset="0"/>
               </a:rPr>
             </a:br>
@@ -7244,8 +7246,8 @@
         </p:nvSpPr>
         <p:spPr>
           <a:xfrm>
-            <a:off x="8978900" y="1092199"/>
-            <a:ext cx="2930297" cy="4708981"/>
+            <a:off x="8978900" y="806449"/>
+            <a:ext cx="2930297" cy="4339650"/>
           </a:xfrm>
           <a:prstGeom prst="rect">
             <a:avLst/>
@@ -7267,29 +7269,7 @@
                   </a:schemeClr>
                 </a:solidFill>
               </a:rPr>
-              <a:t>TAPI lists do not have an ordered-by </a:t>
-            </a:r>
-            <a:r>
-              <a:rPr lang="en-US" sz="1200">
-                <a:solidFill>
-                  <a:schemeClr val="tx2">
-                    <a:lumMod val="75000"/>
-                    <a:lumOff val="25000"/>
-                  </a:schemeClr>
-                </a:solidFill>
-              </a:rPr>
-              <a:t>clause. For </a:t>
-            </a:r>
-            <a:r>
-              <a:rPr lang="en-US" sz="1200" dirty="0">
-                <a:solidFill>
-                  <a:schemeClr val="tx2">
-                    <a:lumMod val="75000"/>
-                    <a:lumOff val="25000"/>
-                  </a:schemeClr>
-                </a:solidFill>
-              </a:rPr>
-              <a:t>paged GETs, we can assume ascending order sort based on </a:t>
+              <a:t>TAPI lists do not have an ordered-by clause. For paged GETs, we can assume ascending order sort based on </a:t>
             </a:r>
             <a:br>
               <a:rPr lang="en-US" sz="1200" dirty="0">
@@ -7403,8 +7383,16 @@
               </a:rPr>
               <a:t>For paging with cursor, we can omit “previous” references from the responses. Supporting “previous” will mean that the server needs to have some memory of the previous page.</a:t>
             </a:r>
-          </a:p>
-          <a:p>
+            <a:br>
+              <a:rPr lang="en-US" sz="1200" dirty="0">
+                <a:solidFill>
+                  <a:schemeClr val="tx2">
+                    <a:lumMod val="75000"/>
+                    <a:lumOff val="25000"/>
+                  </a:schemeClr>
+                </a:solidFill>
+              </a:rPr>
+            </a:br>
             <a:endParaRPr lang="en-US" sz="1200" dirty="0">
               <a:solidFill>
                 <a:schemeClr val="tx2">
@@ -7413,19 +7401,6 @@
                 </a:schemeClr>
               </a:solidFill>
             </a:endParaRPr>
-          </a:p>
-          <a:p>
-            <a:r>
-              <a:rPr lang="en-US" sz="1200" dirty="0">
-                <a:solidFill>
-                  <a:schemeClr val="tx2">
-                    <a:lumMod val="75000"/>
-                    <a:lumOff val="25000"/>
-                  </a:schemeClr>
-                </a:solidFill>
-              </a:rPr>
-              <a:t>And all metadata information can be provided via HTTP response headers.</a:t>
-            </a:r>
           </a:p>
         </p:txBody>
       </p:sp>
